--- a/rust-beginner/02 - Variables/02 - original.pptx
+++ b/rust-beginner/02 - Variables/02 - original.pptx
@@ -423,7 +423,7 @@
           <a:p>
             <a:fld id="{4CCEF282-A95B-40AE-853C-58C34264D18B}" type="datetimeFigureOut">
               <a:rPr lang="de-DE" smtClean="0"/>
-              <a:t>01.05.2024</a:t>
+              <a:t>21.10.2025</a:t>
             </a:fld>
             <a:endParaRPr lang="de-DE"/>
           </a:p>
@@ -1325,7 +1325,7 @@
           <a:p>
             <a:fld id="{BDDDBAF4-5993-4013-8206-68B6AE6C0E94}" type="datetime1">
               <a:rPr lang="de-DE" smtClean="0"/>
-              <a:t>01.05.2024</a:t>
+              <a:t>21.10.2025</a:t>
             </a:fld>
             <a:endParaRPr lang="de-DE"/>
           </a:p>
@@ -2549,7 +2549,7 @@
           <a:p>
             <a:fld id="{9ACE0956-EBFF-44FB-B747-3637D6DDA9AC}" type="datetime1">
               <a:rPr lang="de-DE" smtClean="0"/>
-              <a:t>01.05.2024</a:t>
+              <a:t>21.10.2025</a:t>
             </a:fld>
             <a:endParaRPr lang="de-DE"/>
           </a:p>
@@ -2706,7 +2706,7 @@
           <a:p>
             <a:fld id="{EE0F7B80-79DB-4B16-8A30-CD9CA642E93F}" type="datetime1">
               <a:rPr lang="de-DE" smtClean="0"/>
-              <a:t>01.05.2024</a:t>
+              <a:t>21.10.2025</a:t>
             </a:fld>
             <a:endParaRPr lang="de-DE"/>
           </a:p>
@@ -3799,7 +3799,7 @@
           <a:p>
             <a:fld id="{11841E0B-2DBE-4DBD-BB99-3B2F008D0453}" type="datetime1">
               <a:rPr lang="de-DE" smtClean="0"/>
-              <a:t>01.05.2024</a:t>
+              <a:t>21.10.2025</a:t>
             </a:fld>
             <a:endParaRPr lang="de-DE"/>
           </a:p>
@@ -4321,7 +4321,7 @@
           <a:p>
             <a:fld id="{7ECAC185-C8C9-4DB8-912D-5CF042A71D39}" type="datetime1">
               <a:rPr lang="de-DE" smtClean="0"/>
-              <a:t>01.05.2024</a:t>
+              <a:t>21.10.2025</a:t>
             </a:fld>
             <a:endParaRPr lang="de-DE"/>
           </a:p>
@@ -4976,7 +4976,7 @@
           <a:p>
             <a:fld id="{1CC20C92-8401-456F-A3C5-CFA4615D0C61}" type="datetime1">
               <a:rPr lang="de-DE" smtClean="0"/>
-              <a:t>01.05.2024</a:t>
+              <a:t>21.10.2025</a:t>
             </a:fld>
             <a:endParaRPr lang="de-DE"/>
           </a:p>
@@ -5365,7 +5365,7 @@
           <a:p>
             <a:fld id="{25895B02-2E27-441F-933D-1748416F074B}" type="datetime1">
               <a:rPr lang="de-DE" smtClean="0"/>
-              <a:t>01.05.2024</a:t>
+              <a:t>21.10.2025</a:t>
             </a:fld>
             <a:endParaRPr lang="de-DE"/>
           </a:p>
@@ -5887,7 +5887,7 @@
           <a:p>
             <a:fld id="{91DAC472-0208-4EBB-9DCF-E062E47D18AB}" type="datetime1">
               <a:rPr lang="de-DE" smtClean="0"/>
-              <a:t>01.05.2024</a:t>
+              <a:t>21.10.2025</a:t>
             </a:fld>
             <a:endParaRPr lang="de-DE"/>
           </a:p>
@@ -6980,7 +6980,7 @@
           <a:p>
             <a:fld id="{38289240-026E-4825-B8CC-240AAE79FD98}" type="datetime1">
               <a:rPr lang="de-DE" smtClean="0"/>
-              <a:t>01.05.2024</a:t>
+              <a:t>21.10.2025</a:t>
             </a:fld>
             <a:endParaRPr lang="de-DE"/>
           </a:p>
@@ -7662,7 +7662,7 @@
           <a:p>
             <a:fld id="{B0F34F03-5F95-49EA-B14F-97D3425B1719}" type="datetime1">
               <a:rPr lang="de-DE" smtClean="0"/>
-              <a:t>01.05.2024</a:t>
+              <a:t>21.10.2025</a:t>
             </a:fld>
             <a:endParaRPr lang="de-DE"/>
           </a:p>
@@ -7970,7 +7970,7 @@
           <a:p>
             <a:fld id="{DDC7031D-BA39-406A-A881-AFC471F7A483}" type="datetime1">
               <a:rPr lang="de-DE" smtClean="0"/>
-              <a:t>01.05.2024</a:t>
+              <a:t>21.10.2025</a:t>
             </a:fld>
             <a:endParaRPr lang="de-DE"/>
           </a:p>
@@ -8738,7 +8738,7 @@
           <a:p>
             <a:fld id="{90692495-19FF-4D19-82A1-0582E412D1FE}" type="datetime1">
               <a:rPr lang="de-DE" smtClean="0"/>
-              <a:t>01.05.2024</a:t>
+              <a:t>21.10.2025</a:t>
             </a:fld>
             <a:endParaRPr lang="de-DE"/>
           </a:p>
@@ -9828,7 +9828,7 @@
           <a:p>
             <a:fld id="{581022B4-8C6E-4D27-8D2C-5B0B0E7D4007}" type="datetime1">
               <a:rPr lang="de-DE" smtClean="0"/>
-              <a:t>01.05.2024</a:t>
+              <a:t>21.10.2025</a:t>
             </a:fld>
             <a:endParaRPr lang="de-DE"/>
           </a:p>
@@ -10137,7 +10137,7 @@
           <a:p>
             <a:fld id="{581022B4-8C6E-4D27-8D2C-5B0B0E7D4007}" type="datetime1">
               <a:rPr lang="de-DE" smtClean="0"/>
-              <a:t>01.05.2024</a:t>
+              <a:t>21.10.2025</a:t>
             </a:fld>
             <a:endParaRPr lang="de-DE"/>
           </a:p>
@@ -10336,7 +10336,7 @@
           <a:p>
             <a:fld id="{A4FE0BFF-C197-458E-A632-186D5355030C}" type="datetime1">
               <a:rPr lang="de-DE" smtClean="0"/>
-              <a:t>01.05.2024</a:t>
+              <a:t>21.10.2025</a:t>
             </a:fld>
             <a:endParaRPr lang="de-DE"/>
           </a:p>
@@ -10618,7 +10618,7 @@
           <a:p>
             <a:fld id="{201D0455-141B-4312-99B9-AD5A1BBEE14E}" type="datetime1">
               <a:rPr lang="de-DE" smtClean="0"/>
-              <a:t>01.05.2024</a:t>
+              <a:t>21.10.2025</a:t>
             </a:fld>
             <a:endParaRPr lang="de-DE"/>
           </a:p>
@@ -10946,7 +10946,7 @@
           <a:p>
             <a:fld id="{FAD9A224-DC06-40F0-A7AA-1B6895E3B7B8}" type="datetime1">
               <a:rPr lang="de-DE" smtClean="0"/>
-              <a:t>01.05.2024</a:t>
+              <a:t>21.10.2025</a:t>
             </a:fld>
             <a:endParaRPr lang="de-DE"/>
           </a:p>
@@ -11298,7 +11298,7 @@
           <a:p>
             <a:fld id="{019B2DF9-C522-420A-967B-434E7D2A5B7C}" type="datetime1">
               <a:rPr lang="de-DE" smtClean="0"/>
-              <a:t>01.05.2024</a:t>
+              <a:t>21.10.2025</a:t>
             </a:fld>
             <a:endParaRPr lang="de-DE"/>
           </a:p>
@@ -11742,7 +11742,7 @@
           <a:p>
             <a:fld id="{96AE541D-87BE-4AC2-B54F-45F95B896449}" type="datetime1">
               <a:rPr lang="de-DE" smtClean="0"/>
-              <a:t>01.05.2024</a:t>
+              <a:t>21.10.2025</a:t>
             </a:fld>
             <a:endParaRPr lang="de-DE"/>
           </a:p>
@@ -12186,7 +12186,7 @@
           <a:p>
             <a:fld id="{F97CBD1A-3DCE-4096-BAB6-C3027B08AFF5}" type="datetime1">
               <a:rPr lang="de-DE" smtClean="0"/>
-              <a:t>01.05.2024</a:t>
+              <a:t>21.10.2025</a:t>
             </a:fld>
             <a:endParaRPr lang="de-DE"/>
           </a:p>
@@ -12556,7 +12556,7 @@
           <a:p>
             <a:fld id="{58A6DB93-E449-422A-B540-2AE88F998A4E}" type="datetime1">
               <a:rPr lang="de-DE" smtClean="0"/>
-              <a:t>01.05.2024</a:t>
+              <a:t>21.10.2025</a:t>
             </a:fld>
             <a:endParaRPr lang="de-DE"/>
           </a:p>
@@ -12705,7 +12705,7 @@
           <a:p>
             <a:fld id="{D7F1BEA8-4957-4A04-BD3D-CB24E43F2D9D}" type="datetime1">
               <a:rPr lang="de-DE" smtClean="0"/>
-              <a:t>01.05.2024</a:t>
+              <a:t>21.10.2025</a:t>
             </a:fld>
             <a:endParaRPr lang="de-DE"/>
           </a:p>
@@ -12820,7 +12820,7 @@
           <a:p>
             <a:fld id="{388EEFF6-A170-49CB-A01F-A182A4C42087}" type="datetime1">
               <a:rPr lang="de-DE" smtClean="0"/>
-              <a:t>01.05.2024</a:t>
+              <a:t>21.10.2025</a:t>
             </a:fld>
             <a:endParaRPr lang="de-DE"/>
           </a:p>
@@ -13017,7 +13017,7 @@
           <a:p>
             <a:fld id="{0D72A7D9-F848-4466-9CA5-58F0E384F518}" type="datetime1">
               <a:rPr lang="de-DE" smtClean="0"/>
-              <a:t>01.05.2024</a:t>
+              <a:t>21.10.2025</a:t>
             </a:fld>
             <a:endParaRPr lang="de-DE"/>
           </a:p>
@@ -13186,7 +13186,7 @@
           <a:p>
             <a:fld id="{B5A07C56-F983-48E5-99BD-4F6A9C2BD60C}" type="datetime1">
               <a:rPr lang="de-DE" smtClean="0"/>
-              <a:t>01.05.2024</a:t>
+              <a:t>21.10.2025</a:t>
             </a:fld>
             <a:endParaRPr lang="de-DE"/>
           </a:p>
@@ -13467,7 +13467,7 @@
           <a:p>
             <a:fld id="{715B0D44-7132-41CC-820F-E2CADFA6FDE7}" type="datetime1">
               <a:rPr lang="de-DE" smtClean="0"/>
-              <a:t>01.05.2024</a:t>
+              <a:t>21.10.2025</a:t>
             </a:fld>
             <a:endParaRPr lang="de-DE"/>
           </a:p>
@@ -13794,7 +13794,7 @@
           <a:p>
             <a:fld id="{9FDB698E-5C26-416C-A83E-62CA39F5ACC2}" type="datetime1">
               <a:rPr lang="de-DE" smtClean="0"/>
-              <a:t>01.05.2024</a:t>
+              <a:t>21.10.2025</a:t>
             </a:fld>
             <a:endParaRPr lang="de-DE"/>
           </a:p>
@@ -14159,7 +14159,7 @@
           <a:p>
             <a:fld id="{5B831B7F-2D95-429D-8136-225A12F004BB}" type="datetime1">
               <a:rPr lang="de-DE" smtClean="0"/>
-              <a:t>01.05.2024</a:t>
+              <a:t>21.10.2025</a:t>
             </a:fld>
             <a:endParaRPr lang="de-DE"/>
           </a:p>
@@ -14398,7 +14398,7 @@
           <a:p>
             <a:fld id="{7699678A-8121-40B6-A2F5-B1FEE92FBE7C}" type="datetime1">
               <a:rPr lang="de-DE" smtClean="0"/>
-              <a:t>01.05.2024</a:t>
+              <a:t>21.10.2025</a:t>
             </a:fld>
             <a:endParaRPr lang="de-DE"/>
           </a:p>
@@ -14553,7 +14553,7 @@
           <a:p>
             <a:fld id="{2D5683B0-64A3-461B-878A-E0BF0620368F}" type="datetime1">
               <a:rPr lang="de-DE" smtClean="0"/>
-              <a:t>01.05.2024</a:t>
+              <a:t>21.10.2025</a:t>
             </a:fld>
             <a:endParaRPr lang="de-DE"/>
           </a:p>
@@ -14744,7 +14744,7 @@
           <a:p>
             <a:fld id="{4B3171BB-B4ED-4F67-B03B-9E7B0A9318BB}" type="datetime1">
               <a:rPr lang="de-DE" smtClean="0"/>
-              <a:t>01.05.2024</a:t>
+              <a:t>21.10.2025</a:t>
             </a:fld>
             <a:endParaRPr lang="de-DE"/>
           </a:p>
@@ -15094,7 +15094,7 @@
           <a:p>
             <a:fld id="{65B027E3-CF61-4D3A-BCFB-2985202B1731}" type="datetime1">
               <a:rPr lang="de-DE" smtClean="0"/>
-              <a:t>01.05.2024</a:t>
+              <a:t>21.10.2025</a:t>
             </a:fld>
             <a:endParaRPr lang="de-DE"/>
           </a:p>
@@ -15261,22 +15261,31 @@
               <a:buChar char="-"/>
             </a:pPr>
             <a:r>
-              <a:rPr lang="de-DE" dirty="0">
+              <a:rPr lang="de-DE">
                 <a:solidFill>
                   <a:srgbClr val="00FF00"/>
                 </a:solidFill>
                 <a:sym typeface="Wingdings" panose="05000000000000000000" pitchFamily="2" charset="2"/>
               </a:rPr>
-              <a:t>Compound</a:t>
-            </a:r>
-            <a:r>
-              <a:rPr lang="de-DE" dirty="0">
+              <a:t>Composite</a:t>
+            </a:r>
+            <a:r>
+              <a:rPr lang="de-DE">
                 <a:solidFill>
                   <a:schemeClr val="bg1"/>
                 </a:solidFill>
                 <a:sym typeface="Wingdings" panose="05000000000000000000" pitchFamily="2" charset="2"/>
               </a:rPr>
-              <a:t> types  Combinations of types</a:t>
+              <a:t> </a:t>
+            </a:r>
+            <a:r>
+              <a:rPr lang="de-DE" dirty="0">
+                <a:solidFill>
+                  <a:schemeClr val="bg1"/>
+                </a:solidFill>
+                <a:sym typeface="Wingdings" panose="05000000000000000000" pitchFamily="2" charset="2"/>
+              </a:rPr>
+              <a:t>types  Combinations of types</a:t>
             </a:r>
             <a:endParaRPr lang="de-DE" dirty="0">
               <a:solidFill>
@@ -15309,7 +15318,7 @@
           <a:p>
             <a:fld id="{5CBBDB0D-F61D-42FF-AE37-382937E5D271}" type="datetime1">
               <a:rPr lang="de-DE" smtClean="0"/>
-              <a:t>01.05.2024</a:t>
+              <a:t>21.10.2025</a:t>
             </a:fld>
             <a:endParaRPr lang="de-DE"/>
           </a:p>
@@ -15456,7 +15465,7 @@
           <a:p>
             <a:fld id="{5999E7FA-6C13-42FC-9249-CE93F3F3542B}" type="datetime1">
               <a:rPr lang="de-DE" smtClean="0"/>
-              <a:t>01.05.2024</a:t>
+              <a:t>21.10.2025</a:t>
             </a:fld>
             <a:endParaRPr lang="de-DE"/>
           </a:p>
@@ -15623,22 +15632,31 @@
               <a:buChar char="-"/>
             </a:pPr>
             <a:r>
-              <a:rPr lang="de-DE" dirty="0">
+              <a:rPr lang="de-DE">
                 <a:solidFill>
                   <a:srgbClr val="00FF00"/>
                 </a:solidFill>
                 <a:sym typeface="Wingdings" panose="05000000000000000000" pitchFamily="2" charset="2"/>
               </a:rPr>
-              <a:t>Compound</a:t>
-            </a:r>
-            <a:r>
-              <a:rPr lang="de-DE" dirty="0">
+              <a:t>Composite</a:t>
+            </a:r>
+            <a:r>
+              <a:rPr lang="de-DE">
                 <a:solidFill>
                   <a:schemeClr val="bg1"/>
                 </a:solidFill>
                 <a:sym typeface="Wingdings" panose="05000000000000000000" pitchFamily="2" charset="2"/>
               </a:rPr>
-              <a:t> types  Combinations of types</a:t>
+              <a:t> types </a:t>
+            </a:r>
+            <a:r>
+              <a:rPr lang="de-DE" dirty="0">
+                <a:solidFill>
+                  <a:schemeClr val="bg1"/>
+                </a:solidFill>
+                <a:sym typeface="Wingdings" panose="05000000000000000000" pitchFamily="2" charset="2"/>
+              </a:rPr>
+              <a:t> Combinations of types</a:t>
             </a:r>
           </a:p>
           <a:p>
@@ -15800,8 +15818,56 @@
                 </a:solidFill>
                 <a:sym typeface="Wingdings" panose="05000000000000000000" pitchFamily="2" charset="2"/>
               </a:rPr>
-              <a:t> collections of values</a:t>
-            </a:r>
+              <a:t> collections </a:t>
+            </a:r>
+            <a:r>
+              <a:rPr lang="de-DE">
+                <a:solidFill>
+                  <a:schemeClr val="bg1"/>
+                </a:solidFill>
+                <a:sym typeface="Wingdings" panose="05000000000000000000" pitchFamily="2" charset="2"/>
+              </a:rPr>
+              <a:t>of values</a:t>
+            </a:r>
+          </a:p>
+          <a:p>
+            <a:pPr lvl="2">
+              <a:buFont typeface="Symbol" panose="05050102010706020507" pitchFamily="18" charset="2"/>
+              <a:buChar char="-"/>
+            </a:pPr>
+            <a:r>
+              <a:rPr lang="de-DE">
+                <a:solidFill>
+                  <a:srgbClr val="00FF00"/>
+                </a:solidFill>
+                <a:sym typeface="Wingdings" panose="05000000000000000000" pitchFamily="2" charset="2"/>
+              </a:rPr>
+              <a:t>enum</a:t>
+            </a:r>
+            <a:r>
+              <a:rPr lang="de-DE">
+                <a:solidFill>
+                  <a:schemeClr val="bg1"/>
+                </a:solidFill>
+                <a:sym typeface="Wingdings" panose="05000000000000000000" pitchFamily="2" charset="2"/>
+              </a:rPr>
+              <a:t>  Value that </a:t>
+            </a:r>
+            <a:r>
+              <a:rPr lang="de-DE">
+                <a:solidFill>
+                  <a:srgbClr val="FFFF00"/>
+                </a:solidFill>
+                <a:sym typeface="Wingdings" panose="05000000000000000000" pitchFamily="2" charset="2"/>
+              </a:rPr>
+              <a:t>can be one of several, but fixed types</a:t>
+            </a:r>
+            <a:endParaRPr lang="de-DE" dirty="0">
+              <a:solidFill>
+                <a:srgbClr val="FFFF00"/>
+              </a:solidFill>
+              <a:sym typeface="Wingdings" panose="05000000000000000000" pitchFamily="2" charset="2"/>
+            </a:endParaRPr>
           </a:p>
         </p:txBody>
       </p:sp>
@@ -15828,7 +15894,7 @@
           <a:p>
             <a:fld id="{CD184715-D7CD-446C-A3BE-B84B6040B86E}" type="datetime1">
               <a:rPr lang="de-DE" smtClean="0"/>
-              <a:t>01.05.2024</a:t>
+              <a:t>21.10.2025</a:t>
             </a:fld>
             <a:endParaRPr lang="de-DE"/>
           </a:p>
@@ -15998,7 +16064,7 @@
           <a:p>
             <a:fld id="{CD184715-D7CD-446C-A3BE-B84B6040B86E}" type="datetime1">
               <a:rPr lang="de-DE" smtClean="0"/>
-              <a:t>01.05.2024</a:t>
+              <a:t>21.10.2025</a:t>
             </a:fld>
             <a:endParaRPr lang="de-DE"/>
           </a:p>
@@ -16168,7 +16234,7 @@
           <a:p>
             <a:fld id="{CD184715-D7CD-446C-A3BE-B84B6040B86E}" type="datetime1">
               <a:rPr lang="de-DE" smtClean="0"/>
-              <a:t>01.05.2024</a:t>
+              <a:t>21.10.2025</a:t>
             </a:fld>
             <a:endParaRPr lang="de-DE"/>
           </a:p>
@@ -16404,7 +16470,7 @@
           <a:p>
             <a:fld id="{CD184715-D7CD-446C-A3BE-B84B6040B86E}" type="datetime1">
               <a:rPr lang="de-DE" smtClean="0"/>
-              <a:t>01.05.2024</a:t>
+              <a:t>21.10.2025</a:t>
             </a:fld>
             <a:endParaRPr lang="de-DE"/>
           </a:p>
@@ -16820,7 +16886,7 @@
           <a:p>
             <a:fld id="{CD184715-D7CD-446C-A3BE-B84B6040B86E}" type="datetime1">
               <a:rPr lang="de-DE" smtClean="0"/>
-              <a:t>01.05.2024</a:t>
+              <a:t>21.10.2025</a:t>
             </a:fld>
             <a:endParaRPr lang="de-DE"/>
           </a:p>
@@ -17068,7 +17134,7 @@
           <a:p>
             <a:fld id="{CD184715-D7CD-446C-A3BE-B84B6040B86E}" type="datetime1">
               <a:rPr lang="de-DE" smtClean="0"/>
-              <a:t>01.05.2024</a:t>
+              <a:t>21.10.2025</a:t>
             </a:fld>
             <a:endParaRPr lang="de-DE"/>
           </a:p>
@@ -17403,7 +17469,7 @@
           <a:p>
             <a:fld id="{CD184715-D7CD-446C-A3BE-B84B6040B86E}" type="datetime1">
               <a:rPr lang="de-DE" smtClean="0"/>
-              <a:t>01.05.2024</a:t>
+              <a:t>21.10.2025</a:t>
             </a:fld>
             <a:endParaRPr lang="de-DE"/>
           </a:p>
@@ -17618,7 +17684,7 @@
           <a:p>
             <a:fld id="{CD184715-D7CD-446C-A3BE-B84B6040B86E}" type="datetime1">
               <a:rPr lang="de-DE" smtClean="0"/>
-              <a:t>01.05.2024</a:t>
+              <a:t>21.10.2025</a:t>
             </a:fld>
             <a:endParaRPr lang="de-DE"/>
           </a:p>
@@ -18278,7 +18344,7 @@
           <a:p>
             <a:fld id="{CD184715-D7CD-446C-A3BE-B84B6040B86E}" type="datetime1">
               <a:rPr lang="de-DE" smtClean="0"/>
-              <a:t>01.05.2024</a:t>
+              <a:t>21.10.2025</a:t>
             </a:fld>
             <a:endParaRPr lang="de-DE"/>
           </a:p>
@@ -18523,7 +18589,7 @@
           <a:p>
             <a:fld id="{CD184715-D7CD-446C-A3BE-B84B6040B86E}" type="datetime1">
               <a:rPr lang="de-DE" smtClean="0"/>
-              <a:t>01.05.2024</a:t>
+              <a:t>21.10.2025</a:t>
             </a:fld>
             <a:endParaRPr lang="de-DE"/>
           </a:p>
@@ -18739,7 +18805,7 @@
           <a:p>
             <a:fld id="{C8E522C0-22A9-4A67-9394-9CE4B2991D5B}" type="datetime1">
               <a:rPr lang="de-DE" smtClean="0"/>
-              <a:t>01.05.2024</a:t>
+              <a:t>21.10.2025</a:t>
             </a:fld>
             <a:endParaRPr lang="de-DE"/>
           </a:p>
@@ -19023,7 +19089,7 @@
           <a:p>
             <a:fld id="{CD184715-D7CD-446C-A3BE-B84B6040B86E}" type="datetime1">
               <a:rPr lang="de-DE" smtClean="0"/>
-              <a:t>01.05.2024</a:t>
+              <a:t>21.10.2025</a:t>
             </a:fld>
             <a:endParaRPr lang="de-DE"/>
           </a:p>
@@ -19330,7 +19396,7 @@
           <a:p>
             <a:fld id="{CD184715-D7CD-446C-A3BE-B84B6040B86E}" type="datetime1">
               <a:rPr lang="de-DE" smtClean="0"/>
-              <a:t>01.05.2024</a:t>
+              <a:t>21.10.2025</a:t>
             </a:fld>
             <a:endParaRPr lang="de-DE"/>
           </a:p>
@@ -19449,7 +19515,7 @@
           <a:p>
             <a:fld id="{CD184715-D7CD-446C-A3BE-B84B6040B86E}" type="datetime1">
               <a:rPr lang="de-DE" smtClean="0"/>
-              <a:t>01.05.2024</a:t>
+              <a:t>21.10.2025</a:t>
             </a:fld>
             <a:endParaRPr lang="de-DE"/>
           </a:p>
@@ -19620,7 +19686,7 @@
           <a:p>
             <a:fld id="{CD184715-D7CD-446C-A3BE-B84B6040B86E}" type="datetime1">
               <a:rPr lang="de-DE" smtClean="0"/>
-              <a:t>01.05.2024</a:t>
+              <a:t>21.10.2025</a:t>
             </a:fld>
             <a:endParaRPr lang="de-DE"/>
           </a:p>
@@ -19806,7 +19872,7 @@
           <a:p>
             <a:fld id="{CD184715-D7CD-446C-A3BE-B84B6040B86E}" type="datetime1">
               <a:rPr lang="de-DE" smtClean="0"/>
-              <a:t>01.05.2024</a:t>
+              <a:t>21.10.2025</a:t>
             </a:fld>
             <a:endParaRPr lang="de-DE"/>
           </a:p>
@@ -19986,7 +20052,7 @@
           <a:p>
             <a:fld id="{CD184715-D7CD-446C-A3BE-B84B6040B86E}" type="datetime1">
               <a:rPr lang="de-DE" smtClean="0"/>
-              <a:t>01.05.2024</a:t>
+              <a:t>21.10.2025</a:t>
             </a:fld>
             <a:endParaRPr lang="de-DE"/>
           </a:p>
@@ -20196,7 +20262,7 @@
           <a:p>
             <a:fld id="{CD184715-D7CD-446C-A3BE-B84B6040B86E}" type="datetime1">
               <a:rPr lang="de-DE" smtClean="0"/>
-              <a:t>01.05.2024</a:t>
+              <a:t>21.10.2025</a:t>
             </a:fld>
             <a:endParaRPr lang="de-DE"/>
           </a:p>
@@ -20289,13 +20355,34 @@
           <a:lstStyle/>
           <a:p>
             <a:r>
-              <a:rPr lang="de-DE" dirty="0">
-                <a:solidFill>
-                  <a:schemeClr val="bg1"/>
-                </a:solidFill>
-              </a:rPr>
-              <a:t>Declarations always follow the same rule:</a:t>
-            </a:r>
+              <a:rPr lang="de-DE">
+                <a:solidFill>
+                  <a:schemeClr val="bg1"/>
+                </a:solidFill>
+              </a:rPr>
+              <a:t>Declarations always </a:t>
+            </a:r>
+            <a:r>
+              <a:rPr lang="de-DE" dirty="0">
+                <a:solidFill>
+                  <a:schemeClr val="bg1"/>
+                </a:solidFill>
+              </a:rPr>
+              <a:t>follow the </a:t>
+            </a:r>
+            <a:r>
+              <a:rPr lang="de-DE">
+                <a:solidFill>
+                  <a:schemeClr val="bg1"/>
+                </a:solidFill>
+              </a:rPr>
+              <a:t>same rule*:</a:t>
+            </a:r>
+            <a:endParaRPr lang="de-DE" dirty="0">
+              <a:solidFill>
+                <a:schemeClr val="bg1"/>
+              </a:solidFill>
+            </a:endParaRPr>
           </a:p>
         </p:txBody>
       </p:sp>
@@ -20445,7 +20532,7 @@
           <a:p>
             <a:fld id="{CD184715-D7CD-446C-A3BE-B84B6040B86E}" type="datetime1">
               <a:rPr lang="de-DE" smtClean="0"/>
-              <a:t>01.05.2024</a:t>
+              <a:t>21.10.2025</a:t>
             </a:fld>
             <a:endParaRPr lang="de-DE"/>
           </a:p>
@@ -20538,13 +20625,34 @@
           <a:lstStyle/>
           <a:p>
             <a:r>
-              <a:rPr lang="de-DE" dirty="0">
-                <a:solidFill>
-                  <a:schemeClr val="bg1"/>
-                </a:solidFill>
-              </a:rPr>
-              <a:t>Declarations always follow the same rule:</a:t>
-            </a:r>
+              <a:rPr lang="de-DE">
+                <a:solidFill>
+                  <a:schemeClr val="bg1"/>
+                </a:solidFill>
+              </a:rPr>
+              <a:t>Declarations always </a:t>
+            </a:r>
+            <a:r>
+              <a:rPr lang="de-DE" dirty="0">
+                <a:solidFill>
+                  <a:schemeClr val="bg1"/>
+                </a:solidFill>
+              </a:rPr>
+              <a:t>follow the </a:t>
+            </a:r>
+            <a:r>
+              <a:rPr lang="de-DE">
+                <a:solidFill>
+                  <a:schemeClr val="bg1"/>
+                </a:solidFill>
+              </a:rPr>
+              <a:t>same rule*:</a:t>
+            </a:r>
+            <a:endParaRPr lang="de-DE" dirty="0">
+              <a:solidFill>
+                <a:schemeClr val="bg1"/>
+              </a:solidFill>
+            </a:endParaRPr>
           </a:p>
           <a:p>
             <a:r>
@@ -20764,7 +20872,7 @@
           <a:p>
             <a:fld id="{CD184715-D7CD-446C-A3BE-B84B6040B86E}" type="datetime1">
               <a:rPr lang="de-DE" smtClean="0"/>
-              <a:t>01.05.2024</a:t>
+              <a:t>21.10.2025</a:t>
             </a:fld>
             <a:endParaRPr lang="de-DE"/>
           </a:p>
@@ -20857,13 +20965,34 @@
           <a:lstStyle/>
           <a:p>
             <a:r>
-              <a:rPr lang="de-DE" dirty="0">
-                <a:solidFill>
-                  <a:schemeClr val="bg1"/>
-                </a:solidFill>
-              </a:rPr>
-              <a:t>Declarations always follow the same rule:</a:t>
-            </a:r>
+              <a:rPr lang="de-DE">
+                <a:solidFill>
+                  <a:schemeClr val="bg1"/>
+                </a:solidFill>
+              </a:rPr>
+              <a:t>Declarations always </a:t>
+            </a:r>
+            <a:r>
+              <a:rPr lang="de-DE" dirty="0">
+                <a:solidFill>
+                  <a:schemeClr val="bg1"/>
+                </a:solidFill>
+              </a:rPr>
+              <a:t>follow the </a:t>
+            </a:r>
+            <a:r>
+              <a:rPr lang="de-DE">
+                <a:solidFill>
+                  <a:schemeClr val="bg1"/>
+                </a:solidFill>
+              </a:rPr>
+              <a:t>same rule*:</a:t>
+            </a:r>
+            <a:endParaRPr lang="de-DE" dirty="0">
+              <a:solidFill>
+                <a:schemeClr val="bg1"/>
+              </a:solidFill>
+            </a:endParaRPr>
           </a:p>
           <a:p>
             <a:r>
@@ -21075,7 +21204,7 @@
           <a:p>
             <a:fld id="{CD184715-D7CD-446C-A3BE-B84B6040B86E}" type="datetime1">
               <a:rPr lang="de-DE" smtClean="0"/>
-              <a:t>01.05.2024</a:t>
+              <a:t>21.10.2025</a:t>
             </a:fld>
             <a:endParaRPr lang="de-DE"/>
           </a:p>
@@ -21168,13 +21297,34 @@
           <a:lstStyle/>
           <a:p>
             <a:r>
-              <a:rPr lang="de-DE" dirty="0">
-                <a:solidFill>
-                  <a:schemeClr val="bg1"/>
-                </a:solidFill>
-              </a:rPr>
-              <a:t>Declarations always follow the same rule:</a:t>
-            </a:r>
+              <a:rPr lang="de-DE">
+                <a:solidFill>
+                  <a:schemeClr val="bg1"/>
+                </a:solidFill>
+              </a:rPr>
+              <a:t>Declarations always </a:t>
+            </a:r>
+            <a:r>
+              <a:rPr lang="de-DE" dirty="0">
+                <a:solidFill>
+                  <a:schemeClr val="bg1"/>
+                </a:solidFill>
+              </a:rPr>
+              <a:t>follow the </a:t>
+            </a:r>
+            <a:r>
+              <a:rPr lang="de-DE">
+                <a:solidFill>
+                  <a:schemeClr val="bg1"/>
+                </a:solidFill>
+              </a:rPr>
+              <a:t>same rule*:</a:t>
+            </a:r>
+            <a:endParaRPr lang="de-DE" dirty="0">
+              <a:solidFill>
+                <a:schemeClr val="bg1"/>
+              </a:solidFill>
+            </a:endParaRPr>
           </a:p>
           <a:p>
             <a:r>
@@ -21373,7 +21523,7 @@
           <a:p>
             <a:fld id="{324B5436-A5B1-4655-87B8-3DFBBB76E4D9}" type="datetime1">
               <a:rPr lang="de-DE" smtClean="0"/>
-              <a:t>01.05.2024</a:t>
+              <a:t>21.10.2025</a:t>
             </a:fld>
             <a:endParaRPr lang="de-DE"/>
           </a:p>
@@ -21553,7 +21703,7 @@
           <a:p>
             <a:fld id="{CD184715-D7CD-446C-A3BE-B84B6040B86E}" type="datetime1">
               <a:rPr lang="de-DE" smtClean="0"/>
-              <a:t>01.05.2024</a:t>
+              <a:t>21.10.2025</a:t>
             </a:fld>
             <a:endParaRPr lang="de-DE"/>
           </a:p>
@@ -21646,13 +21796,34 @@
           <a:lstStyle/>
           <a:p>
             <a:r>
-              <a:rPr lang="de-DE" dirty="0">
-                <a:solidFill>
-                  <a:schemeClr val="bg1"/>
-                </a:solidFill>
-              </a:rPr>
-              <a:t>Declarations always follow the same rule:</a:t>
-            </a:r>
+              <a:rPr lang="de-DE">
+                <a:solidFill>
+                  <a:schemeClr val="bg1"/>
+                </a:solidFill>
+              </a:rPr>
+              <a:t>Declarations always </a:t>
+            </a:r>
+            <a:r>
+              <a:rPr lang="de-DE" dirty="0">
+                <a:solidFill>
+                  <a:schemeClr val="bg1"/>
+                </a:solidFill>
+              </a:rPr>
+              <a:t>follow the </a:t>
+            </a:r>
+            <a:r>
+              <a:rPr lang="de-DE">
+                <a:solidFill>
+                  <a:schemeClr val="bg1"/>
+                </a:solidFill>
+              </a:rPr>
+              <a:t>same rule*:</a:t>
+            </a:r>
+            <a:endParaRPr lang="de-DE" dirty="0">
+              <a:solidFill>
+                <a:schemeClr val="bg1"/>
+              </a:solidFill>
+            </a:endParaRPr>
           </a:p>
           <a:p>
             <a:r>
@@ -21864,7 +22035,7 @@
           <a:p>
             <a:fld id="{CD184715-D7CD-446C-A3BE-B84B6040B86E}" type="datetime1">
               <a:rPr lang="de-DE" smtClean="0"/>
-              <a:t>01.05.2024</a:t>
+              <a:t>21.10.2025</a:t>
             </a:fld>
             <a:endParaRPr lang="de-DE"/>
           </a:p>
@@ -21957,13 +22128,34 @@
           <a:lstStyle/>
           <a:p>
             <a:r>
-              <a:rPr lang="de-DE" dirty="0">
-                <a:solidFill>
-                  <a:schemeClr val="bg1"/>
-                </a:solidFill>
-              </a:rPr>
-              <a:t>Declarations always follow the same rule:</a:t>
-            </a:r>
+              <a:rPr lang="de-DE">
+                <a:solidFill>
+                  <a:schemeClr val="bg1"/>
+                </a:solidFill>
+              </a:rPr>
+              <a:t>Declarations always </a:t>
+            </a:r>
+            <a:r>
+              <a:rPr lang="de-DE" dirty="0">
+                <a:solidFill>
+                  <a:schemeClr val="bg1"/>
+                </a:solidFill>
+              </a:rPr>
+              <a:t>follow the </a:t>
+            </a:r>
+            <a:r>
+              <a:rPr lang="de-DE">
+                <a:solidFill>
+                  <a:schemeClr val="bg1"/>
+                </a:solidFill>
+              </a:rPr>
+              <a:t>same rule*:</a:t>
+            </a:r>
+            <a:endParaRPr lang="de-DE" dirty="0">
+              <a:solidFill>
+                <a:schemeClr val="bg1"/>
+              </a:solidFill>
+            </a:endParaRPr>
           </a:p>
           <a:p>
             <a:r>
@@ -22175,7 +22367,7 @@
           <a:p>
             <a:fld id="{CD184715-D7CD-446C-A3BE-B84B6040B86E}" type="datetime1">
               <a:rPr lang="de-DE" smtClean="0"/>
-              <a:t>01.05.2024</a:t>
+              <a:t>21.10.2025</a:t>
             </a:fld>
             <a:endParaRPr lang="de-DE"/>
           </a:p>
@@ -22268,13 +22460,34 @@
           <a:lstStyle/>
           <a:p>
             <a:r>
-              <a:rPr lang="de-DE" dirty="0">
-                <a:solidFill>
-                  <a:schemeClr val="bg1"/>
-                </a:solidFill>
-              </a:rPr>
-              <a:t>Declarations always follow the same rule:</a:t>
-            </a:r>
+              <a:rPr lang="de-DE">
+                <a:solidFill>
+                  <a:schemeClr val="bg1"/>
+                </a:solidFill>
+              </a:rPr>
+              <a:t>Declarations always </a:t>
+            </a:r>
+            <a:r>
+              <a:rPr lang="de-DE" dirty="0">
+                <a:solidFill>
+                  <a:schemeClr val="bg1"/>
+                </a:solidFill>
+              </a:rPr>
+              <a:t>follow the </a:t>
+            </a:r>
+            <a:r>
+              <a:rPr lang="de-DE">
+                <a:solidFill>
+                  <a:schemeClr val="bg1"/>
+                </a:solidFill>
+              </a:rPr>
+              <a:t>same rule*:</a:t>
+            </a:r>
+            <a:endParaRPr lang="de-DE" dirty="0">
+              <a:solidFill>
+                <a:schemeClr val="bg1"/>
+              </a:solidFill>
+            </a:endParaRPr>
           </a:p>
           <a:p>
             <a:r>
@@ -22538,7 +22751,7 @@
           <a:p>
             <a:fld id="{CD184715-D7CD-446C-A3BE-B84B6040B86E}" type="datetime1">
               <a:rPr lang="de-DE" smtClean="0"/>
-              <a:t>01.05.2024</a:t>
+              <a:t>21.10.2025</a:t>
             </a:fld>
             <a:endParaRPr lang="de-DE"/>
           </a:p>
@@ -22631,13 +22844,34 @@
           <a:lstStyle/>
           <a:p>
             <a:r>
-              <a:rPr lang="de-DE" dirty="0">
-                <a:solidFill>
-                  <a:schemeClr val="bg1"/>
-                </a:solidFill>
-              </a:rPr>
-              <a:t>Declarations always follow the same rule:</a:t>
-            </a:r>
+              <a:rPr lang="de-DE">
+                <a:solidFill>
+                  <a:schemeClr val="bg1"/>
+                </a:solidFill>
+              </a:rPr>
+              <a:t>Declarations always </a:t>
+            </a:r>
+            <a:r>
+              <a:rPr lang="de-DE" dirty="0">
+                <a:solidFill>
+                  <a:schemeClr val="bg1"/>
+                </a:solidFill>
+              </a:rPr>
+              <a:t>follow the </a:t>
+            </a:r>
+            <a:r>
+              <a:rPr lang="de-DE">
+                <a:solidFill>
+                  <a:schemeClr val="bg1"/>
+                </a:solidFill>
+              </a:rPr>
+              <a:t>same rule*:</a:t>
+            </a:r>
+            <a:endParaRPr lang="de-DE" dirty="0">
+              <a:solidFill>
+                <a:schemeClr val="bg1"/>
+              </a:solidFill>
+            </a:endParaRPr>
           </a:p>
           <a:p>
             <a:r>
@@ -22930,7 +23164,7 @@
           <a:p>
             <a:fld id="{CD184715-D7CD-446C-A3BE-B84B6040B86E}" type="datetime1">
               <a:rPr lang="de-DE" smtClean="0"/>
-              <a:t>01.05.2024</a:t>
+              <a:t>21.10.2025</a:t>
             </a:fld>
             <a:endParaRPr lang="de-DE"/>
           </a:p>
@@ -23591,7 +23825,7 @@
           <a:p>
             <a:fld id="{CD184715-D7CD-446C-A3BE-B84B6040B86E}" type="datetime1">
               <a:rPr lang="de-DE" smtClean="0"/>
-              <a:t>01.05.2024</a:t>
+              <a:t>21.10.2025</a:t>
             </a:fld>
             <a:endParaRPr lang="de-DE"/>
           </a:p>
@@ -23834,7 +24068,7 @@
           <a:p>
             <a:fld id="{CD184715-D7CD-446C-A3BE-B84B6040B86E}" type="datetime1">
               <a:rPr lang="de-DE" smtClean="0"/>
-              <a:t>01.05.2024</a:t>
+              <a:t>21.10.2025</a:t>
             </a:fld>
             <a:endParaRPr lang="de-DE"/>
           </a:p>
@@ -24206,7 +24440,7 @@
           <a:p>
             <a:fld id="{CD184715-D7CD-446C-A3BE-B84B6040B86E}" type="datetime1">
               <a:rPr lang="de-DE" smtClean="0"/>
-              <a:t>01.05.2024</a:t>
+              <a:t>21.10.2025</a:t>
             </a:fld>
             <a:endParaRPr lang="de-DE"/>
           </a:p>
@@ -24548,7 +24782,7 @@
           <a:p>
             <a:fld id="{CD184715-D7CD-446C-A3BE-B84B6040B86E}" type="datetime1">
               <a:rPr lang="de-DE" smtClean="0"/>
-              <a:t>01.05.2024</a:t>
+              <a:t>21.10.2025</a:t>
             </a:fld>
             <a:endParaRPr lang="de-DE"/>
           </a:p>
@@ -24897,7 +25131,7 @@
           <a:p>
             <a:fld id="{CD184715-D7CD-446C-A3BE-B84B6040B86E}" type="datetime1">
               <a:rPr lang="de-DE" smtClean="0"/>
-              <a:t>01.05.2024</a:t>
+              <a:t>21.10.2025</a:t>
             </a:fld>
             <a:endParaRPr lang="de-DE"/>
           </a:p>
@@ -25100,7 +25334,7 @@
           <a:p>
             <a:fld id="{04E2FF2C-1794-419A-B724-B043ADB00A9B}" type="datetime1">
               <a:rPr lang="de-DE" smtClean="0"/>
-              <a:t>01.05.2024</a:t>
+              <a:t>21.10.2025</a:t>
             </a:fld>
             <a:endParaRPr lang="de-DE"/>
           </a:p>
@@ -25388,7 +25622,7 @@
           <a:p>
             <a:fld id="{CD184715-D7CD-446C-A3BE-B84B6040B86E}" type="datetime1">
               <a:rPr lang="de-DE" smtClean="0"/>
-              <a:t>01.05.2024</a:t>
+              <a:t>21.10.2025</a:t>
             </a:fld>
             <a:endParaRPr lang="de-DE"/>
           </a:p>
@@ -25744,7 +25978,7 @@
           <a:p>
             <a:fld id="{CD184715-D7CD-446C-A3BE-B84B6040B86E}" type="datetime1">
               <a:rPr lang="de-DE" smtClean="0"/>
-              <a:t>01.05.2024</a:t>
+              <a:t>21.10.2025</a:t>
             </a:fld>
             <a:endParaRPr lang="de-DE"/>
           </a:p>
@@ -25859,7 +26093,7 @@
           <a:p>
             <a:fld id="{CD184715-D7CD-446C-A3BE-B84B6040B86E}" type="datetime1">
               <a:rPr lang="de-DE" smtClean="0"/>
-              <a:t>01.05.2024</a:t>
+              <a:t>21.10.2025</a:t>
             </a:fld>
             <a:endParaRPr lang="de-DE"/>
           </a:p>
@@ -26026,7 +26260,7 @@
           <a:p>
             <a:fld id="{CD184715-D7CD-446C-A3BE-B84B6040B86E}" type="datetime1">
               <a:rPr lang="de-DE" smtClean="0"/>
-              <a:t>01.05.2024</a:t>
+              <a:t>21.10.2025</a:t>
             </a:fld>
             <a:endParaRPr lang="de-DE"/>
           </a:p>
@@ -26208,7 +26442,7 @@
           <a:p>
             <a:fld id="{CD184715-D7CD-446C-A3BE-B84B6040B86E}" type="datetime1">
               <a:rPr lang="de-DE" smtClean="0"/>
-              <a:t>01.05.2024</a:t>
+              <a:t>21.10.2025</a:t>
             </a:fld>
             <a:endParaRPr lang="de-DE"/>
           </a:p>
@@ -26405,7 +26639,7 @@
           <a:p>
             <a:fld id="{CD184715-D7CD-446C-A3BE-B84B6040B86E}" type="datetime1">
               <a:rPr lang="de-DE" smtClean="0"/>
-              <a:t>01.05.2024</a:t>
+              <a:t>21.10.2025</a:t>
             </a:fld>
             <a:endParaRPr lang="de-DE"/>
           </a:p>
@@ -26520,7 +26754,7 @@
           <a:p>
             <a:fld id="{CD184715-D7CD-446C-A3BE-B84B6040B86E}" type="datetime1">
               <a:rPr lang="de-DE" smtClean="0"/>
-              <a:t>01.05.2024</a:t>
+              <a:t>21.10.2025</a:t>
             </a:fld>
             <a:endParaRPr lang="de-DE"/>
           </a:p>
@@ -26665,7 +26899,7 @@
           <a:p>
             <a:fld id="{CD184715-D7CD-446C-A3BE-B84B6040B86E}" type="datetime1">
               <a:rPr lang="de-DE" smtClean="0"/>
-              <a:t>01.05.2024</a:t>
+              <a:t>21.10.2025</a:t>
             </a:fld>
             <a:endParaRPr lang="de-DE"/>
           </a:p>
@@ -26932,7 +27166,7 @@
           <a:p>
             <a:fld id="{CD184715-D7CD-446C-A3BE-B84B6040B86E}" type="datetime1">
               <a:rPr lang="de-DE" smtClean="0"/>
-              <a:t>01.05.2024</a:t>
+              <a:t>21.10.2025</a:t>
             </a:fld>
             <a:endParaRPr lang="de-DE"/>
           </a:p>
@@ -27240,7 +27474,7 @@
           <a:p>
             <a:fld id="{CD184715-D7CD-446C-A3BE-B84B6040B86E}" type="datetime1">
               <a:rPr lang="de-DE" smtClean="0"/>
-              <a:t>01.05.2024</a:t>
+              <a:t>21.10.2025</a:t>
             </a:fld>
             <a:endParaRPr lang="de-DE"/>
           </a:p>
@@ -27655,7 +27889,7 @@
           <a:p>
             <a:fld id="{779961F3-BA7E-4BF1-AAD5-A6CCAD169155}" type="datetime1">
               <a:rPr lang="de-DE" smtClean="0"/>
-              <a:t>01.05.2024</a:t>
+              <a:t>21.10.2025</a:t>
             </a:fld>
             <a:endParaRPr lang="de-DE"/>
           </a:p>
@@ -27770,7 +28004,7 @@
           <a:p>
             <a:fld id="{CD184715-D7CD-446C-A3BE-B84B6040B86E}" type="datetime1">
               <a:rPr lang="de-DE" smtClean="0"/>
-              <a:t>01.05.2024</a:t>
+              <a:t>21.10.2025</a:t>
             </a:fld>
             <a:endParaRPr lang="de-DE"/>
           </a:p>
@@ -28160,7 +28394,7 @@
           <a:p>
             <a:fld id="{CD184715-D7CD-446C-A3BE-B84B6040B86E}" type="datetime1">
               <a:rPr lang="de-DE" smtClean="0"/>
-              <a:t>01.05.2024</a:t>
+              <a:t>21.10.2025</a:t>
             </a:fld>
             <a:endParaRPr lang="de-DE"/>
           </a:p>
@@ -28591,7 +28825,7 @@
           <a:p>
             <a:fld id="{CD184715-D7CD-446C-A3BE-B84B6040B86E}" type="datetime1">
               <a:rPr lang="de-DE" smtClean="0"/>
-              <a:t>01.05.2024</a:t>
+              <a:t>21.10.2025</a:t>
             </a:fld>
             <a:endParaRPr lang="de-DE"/>
           </a:p>
@@ -29179,7 +29413,7 @@
           <a:p>
             <a:fld id="{CD184715-D7CD-446C-A3BE-B84B6040B86E}" type="datetime1">
               <a:rPr lang="de-DE" smtClean="0"/>
-              <a:t>01.05.2024</a:t>
+              <a:t>21.10.2025</a:t>
             </a:fld>
             <a:endParaRPr lang="de-DE"/>
           </a:p>
@@ -29294,7 +29528,7 @@
           <a:p>
             <a:fld id="{CD184715-D7CD-446C-A3BE-B84B6040B86E}" type="datetime1">
               <a:rPr lang="de-DE" smtClean="0"/>
-              <a:t>01.05.2024</a:t>
+              <a:t>21.10.2025</a:t>
             </a:fld>
             <a:endParaRPr lang="de-DE"/>
           </a:p>
@@ -29741,7 +29975,7 @@
           <a:p>
             <a:fld id="{CD184715-D7CD-446C-A3BE-B84B6040B86E}" type="datetime1">
               <a:rPr lang="de-DE" smtClean="0"/>
-              <a:t>01.05.2024</a:t>
+              <a:t>21.10.2025</a:t>
             </a:fld>
             <a:endParaRPr lang="de-DE"/>
           </a:p>
@@ -30244,7 +30478,7 @@
           <a:p>
             <a:fld id="{CD184715-D7CD-446C-A3BE-B84B6040B86E}" type="datetime1">
               <a:rPr lang="de-DE" smtClean="0"/>
-              <a:t>01.05.2024</a:t>
+              <a:t>21.10.2025</a:t>
             </a:fld>
             <a:endParaRPr lang="de-DE"/>
           </a:p>
@@ -30743,7 +30977,7 @@
           <a:p>
             <a:fld id="{CD184715-D7CD-446C-A3BE-B84B6040B86E}" type="datetime1">
               <a:rPr lang="de-DE" smtClean="0"/>
-              <a:t>01.05.2024</a:t>
+              <a:t>21.10.2025</a:t>
             </a:fld>
             <a:endParaRPr lang="de-DE"/>
           </a:p>
@@ -31242,7 +31476,7 @@
           <a:p>
             <a:fld id="{CD184715-D7CD-446C-A3BE-B84B6040B86E}" type="datetime1">
               <a:rPr lang="de-DE" smtClean="0"/>
-              <a:t>01.05.2024</a:t>
+              <a:t>21.10.2025</a:t>
             </a:fld>
             <a:endParaRPr lang="de-DE"/>
           </a:p>
@@ -31741,7 +31975,7 @@
           <a:p>
             <a:fld id="{CD184715-D7CD-446C-A3BE-B84B6040B86E}" type="datetime1">
               <a:rPr lang="de-DE" smtClean="0"/>
-              <a:t>01.05.2024</a:t>
+              <a:t>21.10.2025</a:t>
             </a:fld>
             <a:endParaRPr lang="de-DE"/>
           </a:p>
@@ -32398,7 +32632,7 @@
           <a:p>
             <a:fld id="{BDF66601-B675-4825-A98D-0B8950F1A623}" type="datetime1">
               <a:rPr lang="de-DE" smtClean="0"/>
-              <a:t>01.05.2024</a:t>
+              <a:t>21.10.2025</a:t>
             </a:fld>
             <a:endParaRPr lang="de-DE"/>
           </a:p>
@@ -32643,7 +32877,7 @@
           <a:p>
             <a:fld id="{CD184715-D7CD-446C-A3BE-B84B6040B86E}" type="datetime1">
               <a:rPr lang="de-DE" smtClean="0"/>
-              <a:t>01.05.2024</a:t>
+              <a:t>21.10.2025</a:t>
             </a:fld>
             <a:endParaRPr lang="de-DE"/>
           </a:p>
@@ -32903,7 +33137,7 @@
           <a:p>
             <a:fld id="{CD184715-D7CD-446C-A3BE-B84B6040B86E}" type="datetime1">
               <a:rPr lang="de-DE" smtClean="0"/>
-              <a:t>01.05.2024</a:t>
+              <a:t>21.10.2025</a:t>
             </a:fld>
             <a:endParaRPr lang="de-DE"/>
           </a:p>
@@ -33197,7 +33431,7 @@
           <a:p>
             <a:fld id="{CD184715-D7CD-446C-A3BE-B84B6040B86E}" type="datetime1">
               <a:rPr lang="de-DE" smtClean="0"/>
-              <a:t>01.05.2024</a:t>
+              <a:t>21.10.2025</a:t>
             </a:fld>
             <a:endParaRPr lang="de-DE"/>
           </a:p>
@@ -33524,7 +33758,7 @@
           <a:p>
             <a:fld id="{CD184715-D7CD-446C-A3BE-B84B6040B86E}" type="datetime1">
               <a:rPr lang="de-DE" smtClean="0"/>
-              <a:t>01.05.2024</a:t>
+              <a:t>21.10.2025</a:t>
             </a:fld>
             <a:endParaRPr lang="de-DE"/>
           </a:p>
@@ -33866,7 +34100,7 @@
           <a:p>
             <a:fld id="{CD184715-D7CD-446C-A3BE-B84B6040B86E}" type="datetime1">
               <a:rPr lang="de-DE" smtClean="0"/>
-              <a:t>01.05.2024</a:t>
+              <a:t>21.10.2025</a:t>
             </a:fld>
             <a:endParaRPr lang="de-DE"/>
           </a:p>
@@ -34018,7 +34252,7 @@
           <a:p>
             <a:fld id="{CD184715-D7CD-446C-A3BE-B84B6040B86E}" type="datetime1">
               <a:rPr lang="de-DE" smtClean="0"/>
-              <a:t>01.05.2024</a:t>
+              <a:t>21.10.2025</a:t>
             </a:fld>
             <a:endParaRPr lang="de-DE"/>
           </a:p>
@@ -34163,7 +34397,7 @@
           <a:p>
             <a:fld id="{CD184715-D7CD-446C-A3BE-B84B6040B86E}" type="datetime1">
               <a:rPr lang="de-DE" smtClean="0"/>
-              <a:t>01.05.2024</a:t>
+              <a:t>21.10.2025</a:t>
             </a:fld>
             <a:endParaRPr lang="de-DE"/>
           </a:p>
@@ -34367,7 +34601,7 @@
           <a:p>
             <a:fld id="{CD184715-D7CD-446C-A3BE-B84B6040B86E}" type="datetime1">
               <a:rPr lang="de-DE" smtClean="0"/>
-              <a:t>01.05.2024</a:t>
+              <a:t>21.10.2025</a:t>
             </a:fld>
             <a:endParaRPr lang="de-DE"/>
           </a:p>
@@ -34625,7 +34859,7 @@
           <a:p>
             <a:fld id="{CD184715-D7CD-446C-A3BE-B84B6040B86E}" type="datetime1">
               <a:rPr lang="de-DE" smtClean="0"/>
-              <a:t>01.05.2024</a:t>
+              <a:t>21.10.2025</a:t>
             </a:fld>
             <a:endParaRPr lang="de-DE"/>
           </a:p>
@@ -35036,7 +35270,7 @@
           <a:p>
             <a:fld id="{CD184715-D7CD-446C-A3BE-B84B6040B86E}" type="datetime1">
               <a:rPr lang="de-DE" smtClean="0"/>
-              <a:t>01.05.2024</a:t>
+              <a:t>21.10.2025</a:t>
             </a:fld>
             <a:endParaRPr lang="de-DE"/>
           </a:p>
@@ -35378,7 +35612,7 @@
           <a:p>
             <a:fld id="{2D57B0BE-8260-4AD1-B3BA-04D59E94D42B}" type="datetime1">
               <a:rPr lang="de-DE" smtClean="0"/>
-              <a:t>01.05.2024</a:t>
+              <a:t>21.10.2025</a:t>
             </a:fld>
             <a:endParaRPr lang="de-DE"/>
           </a:p>
@@ -35523,7 +35757,7 @@
           <a:p>
             <a:fld id="{CD184715-D7CD-446C-A3BE-B84B6040B86E}" type="datetime1">
               <a:rPr lang="de-DE" smtClean="0"/>
-              <a:t>01.05.2024</a:t>
+              <a:t>21.10.2025</a:t>
             </a:fld>
             <a:endParaRPr lang="de-DE"/>
           </a:p>
@@ -35851,7 +36085,7 @@
           <a:p>
             <a:fld id="{CD184715-D7CD-446C-A3BE-B84B6040B86E}" type="datetime1">
               <a:rPr lang="de-DE" smtClean="0"/>
-              <a:t>01.05.2024</a:t>
+              <a:t>21.10.2025</a:t>
             </a:fld>
             <a:endParaRPr lang="de-DE"/>
           </a:p>
@@ -36233,7 +36467,7 @@
           <a:p>
             <a:fld id="{CD184715-D7CD-446C-A3BE-B84B6040B86E}" type="datetime1">
               <a:rPr lang="de-DE" smtClean="0"/>
-              <a:t>01.05.2024</a:t>
+              <a:t>21.10.2025</a:t>
             </a:fld>
             <a:endParaRPr lang="de-DE"/>
           </a:p>
@@ -36837,7 +37071,7 @@
           <a:p>
             <a:fld id="{7ECAC185-C8C9-4DB8-912D-5CF042A71D39}" type="datetime1">
               <a:rPr lang="de-DE" smtClean="0"/>
-              <a:t>01.05.2024</a:t>
+              <a:t>21.10.2025</a:t>
             </a:fld>
             <a:endParaRPr lang="de-DE"/>
           </a:p>
